--- a/cs701/slides/week-06.pptx
+++ b/cs701/slides/week-06.pptx
@@ -6783,7 +6783,7 @@
                   <a:srgbClr val="01AEFD"/>
                 </a:solidFill>
               </a:rPr>
-              <a:t>Type this into Palindrome.java   -   line 1</a:t>
+              <a:t>Make a new file, Palindrome.java, and type this in   -   line 1</a:t>
             </a:r>
           </a:p>
         </p:txBody>
@@ -7054,7 +7054,7 @@
                   <a:srgbClr val="DCECEF"/>
                 </a:solidFill>
               </a:rPr>
-              <a:t>Opens the class. Its name must be the file's name without .java - Palindrome lives in Palindrome.java - and every other line goes inside its braces.</a:t>
+              <a:t>Opens the class: Palindrome, the file's name without .java.</a:t>
             </a:r>
           </a:p>
         </p:txBody>
@@ -12145,7 +12145,7 @@
                   <a:srgbClr val="01AEFD"/>
                 </a:solidFill>
               </a:rPr>
-              <a:t>Type this into StringMethods.java   -   line 1</a:t>
+              <a:t>Make a new file, StringMethods.java, and type this in   -   line 1</a:t>
             </a:r>
           </a:p>
         </p:txBody>
@@ -12226,7 +12226,7 @@
                   <a:srgbClr val="DCECEF"/>
                 </a:solidFill>
               </a:rPr>
-              <a:t>Opens the class. Its name must be the file's name without .java - StringMethods lives in StringMethods.java - and every other line goes inside its braces.</a:t>
+              <a:t>Opens the class: StringMethods, the file's name without .java.</a:t>
             </a:r>
           </a:p>
         </p:txBody>
@@ -12412,7 +12412,7 @@
                   <a:srgbClr val="01AEFD"/>
                 </a:solidFill>
               </a:rPr>
-              <a:t>Type this into VowelsAndConsonants.java   -   line 1</a:t>
+              <a:t>Make a new file, VowelsAndConsonants.java, and type this in   -   line 1</a:t>
             </a:r>
           </a:p>
         </p:txBody>
@@ -12683,7 +12683,7 @@
                   <a:srgbClr val="DCECEF"/>
                 </a:solidFill>
               </a:rPr>
-              <a:t>Opens the class. Its name must be the file's name without .java - VowelsAndConsonants lives in VowelsAndConsonants.java - and every other line goes inside its braces.</a:t>
+              <a:t>Opens the class: VowelsAndConsonants, the file's name without .java.</a:t>
             </a:r>
           </a:p>
         </p:txBody>
